--- a/docs/mid-project-review.pptx
+++ b/docs/mid-project-review.pptx
@@ -8484,7 +8484,7 @@
               </a:defRPr>
             </a:pPr>
             <a:r>
-              <a:t>• Validated: 33 automated tests, lint clean, checkpoint resume with exact state parity</a:t>
+              <a:t>• Validated: 55 automated tests, lint clean, checkpoint resume with exact state parity</a:t>
             </a:r>
           </a:p>
           <a:p>
